--- a/design/existing-customers-sample/existing-customers-sample.pptx
+++ b/design/existing-customers-sample/existing-customers-sample.pptx
@@ -12,6 +12,7 @@
     <p:handoutMasterId r:id="rId33"/>
   </p:handoutMasterIdLst>
   <p:sldIdLst>
+    <p:sldId id="261" r:id="rId17"/>
     <p:sldId id="256" r:id="rId12"/>
     <p:sldId id="257" r:id="rId13"/>
     <p:sldId id="258" r:id="rId14"/>
@@ -26426,6 +26427,87 @@
                 </a:solidFill>
               </a:rPr>
               <a:t>冷凍の主委託先とは長期契約の可能性が高い。置き換えを正面から提案せず、新しく生まれる区画から入る</a:t>
+            </a:r>
+          </a:p>
+        </p:txBody>
+      </p:sp>
+    </p:spTree>
+  </p:cSld>
+  <p:clrMapOvr>
+    <a:masterClrMapping/>
+  </p:clrMapOvr>
+</p:sld>
+</file>
+
+<file path=ppt/slides/slide6.xml><?xml version="1.0" encoding="utf-8"?>
+<p:sld xmlns:a="http://schemas.openxmlformats.org/drawingml/2006/main" xmlns:p="http://schemas.openxmlformats.org/presentationml/2006/main" xmlns:r="http://schemas.openxmlformats.org/officeDocument/2006/relationships">
+  <p:cSld>
+    <p:spTree>
+      <p:nvGrpSpPr>
+        <p:cNvPr id="1" name=""/>
+        <p:cNvGrpSpPr/>
+        <p:nvPr/>
+      </p:nvGrpSpPr>
+      <p:grpSpPr/>
+      <p:sp>
+        <p:nvSpPr>
+          <p:cNvPr id="2" name="Text Placeholder 1"/>
+          <p:cNvSpPr>
+            <a:spLocks noGrp="1"/>
+          </p:cNvSpPr>
+          <p:nvPr>
+            <p:ph type="body" idx="11" sz="quarter"/>
+          </p:nvPr>
+        </p:nvSpPr>
+        <p:spPr/>
+        <p:txBody>
+          <a:bodyPr/>
+          <a:lstStyle/>
+          <a:p>
+            <a:r>
+              <a:t>サンプル食品株式会社　企業クローズアップ</a:t>
+            </a:r>
+          </a:p>
+        </p:txBody>
+      </p:sp>
+      <p:sp>
+        <p:nvSpPr>
+          <p:cNvPr id="3" name="Text Placeholder 2"/>
+          <p:cNvSpPr>
+            <a:spLocks noGrp="1"/>
+          </p:cNvSpPr>
+          <p:nvPr>
+            <p:ph type="body" idx="12" sz="quarter"/>
+          </p:nvPr>
+        </p:nvSpPr>
+        <p:spPr/>
+        <p:txBody>
+          <a:bodyPr/>
+          <a:lstStyle/>
+          <a:p>
+            <a:r>
+              <a:t>サンプル物流株式会社　御中</a:t>
+            </a:r>
+          </a:p>
+        </p:txBody>
+      </p:sp>
+      <p:sp>
+        <p:nvSpPr>
+          <p:cNvPr id="4" name="Text Placeholder 3"/>
+          <p:cNvSpPr>
+            <a:spLocks noGrp="1"/>
+          </p:cNvSpPr>
+          <p:nvPr>
+            <p:ph type="body" idx="13" sz="quarter"/>
+          </p:nvPr>
+        </p:nvSpPr>
+        <p:spPr/>
+        <p:txBody>
+          <a:bodyPr/>
+          <a:lstStyle/>
+          <a:p>
+            <a:r>
+              <a:t>2026/10/22</a:t>
             </a:r>
           </a:p>
         </p:txBody>

--- a/design/existing-customers-sample/existing-customers-sample.pptx
+++ b/design/existing-customers-sample/existing-customers-sample.pptx
@@ -13538,7 +13538,7 @@
         </p:nvSpPr>
         <p:spPr>
           <a:xfrm>
-            <a:off x="2851099" y="2340864"/>
+            <a:off x="2980944" y="2231136"/>
             <a:ext cx="621792" cy="621792"/>
           </a:xfrm>
           <a:prstGeom prst="ellipse">
@@ -13580,7 +13580,7 @@
         </p:nvSpPr>
         <p:spPr>
           <a:xfrm>
-            <a:off x="2805379" y="2340864"/>
+            <a:off x="2935224" y="2231136"/>
             <a:ext cx="713232" cy="621792"/>
           </a:xfrm>
           <a:prstGeom prst="rect">
@@ -13622,7 +13622,7 @@
         </p:nvSpPr>
         <p:spPr>
           <a:xfrm>
-            <a:off x="2430475" y="2990088"/>
+            <a:off x="2560320" y="2880360"/>
             <a:ext cx="1463040" cy="182880"/>
           </a:xfrm>
           <a:prstGeom prst="rect">
@@ -13664,7 +13664,7 @@
         </p:nvSpPr>
         <p:spPr>
           <a:xfrm>
-            <a:off x="2395728" y="2880360"/>
+            <a:off x="2460650" y="2990088"/>
             <a:ext cx="493776" cy="493776"/>
           </a:xfrm>
           <a:prstGeom prst="ellipse">
@@ -13706,7 +13706,7 @@
         </p:nvSpPr>
         <p:spPr>
           <a:xfrm>
-            <a:off x="2350008" y="2880360"/>
+            <a:off x="2414930" y="2990088"/>
             <a:ext cx="585216" cy="493776"/>
           </a:xfrm>
           <a:prstGeom prst="rect">
@@ -13748,7 +13748,7 @@
         </p:nvSpPr>
         <p:spPr>
           <a:xfrm>
-            <a:off x="1911096" y="3401568"/>
+            <a:off x="1976018" y="3511296"/>
             <a:ext cx="1463040" cy="182880"/>
           </a:xfrm>
           <a:prstGeom prst="rect">
@@ -24761,8 +24761,8 @@
         </p:blipFill>
         <p:spPr>
           <a:xfrm>
-            <a:off x="438912" y="4097095"/>
-            <a:ext cx="410651" cy="1480744"/>
+            <a:off x="453465" y="3595501"/>
+            <a:ext cx="498470" cy="1797406"/>
           </a:xfrm>
           <a:prstGeom prst="rect">
             <a:avLst/>
@@ -24785,8 +24785,8 @@
         </p:blipFill>
         <p:spPr>
           <a:xfrm>
-            <a:off x="913571" y="4342886"/>
-            <a:ext cx="410651" cy="1234953"/>
+            <a:off x="1015944" y="3893856"/>
+            <a:ext cx="498470" cy="1499051"/>
           </a:xfrm>
           <a:prstGeom prst="rect">
             <a:avLst/>
@@ -24795,7 +24795,7 @@
       </p:pic>
       <p:pic>
         <p:nvPicPr>
-          <p:cNvPr id="16" name="Picture 15" descr="minamo-serum.png"/>
+          <p:cNvPr id="16" name="Picture 15" descr="minamo-cream.png"/>
           <p:cNvPicPr>
             <a:picLocks noChangeAspect="1"/>
           </p:cNvPicPr>
@@ -24809,41 +24809,17 @@
         </p:blipFill>
         <p:spPr>
           <a:xfrm>
-            <a:off x="1388231" y="4366866"/>
-            <a:ext cx="281761" cy="1210973"/>
+            <a:off x="1578423" y="4647020"/>
+            <a:ext cx="800464" cy="745887"/>
           </a:xfrm>
           <a:prstGeom prst="rect">
             <a:avLst/>
           </a:prstGeom>
         </p:spPr>
       </p:pic>
-      <p:pic>
-        <p:nvPicPr>
-          <p:cNvPr id="17" name="Picture 16" descr="minamo-cream.png"/>
-          <p:cNvPicPr>
-            <a:picLocks noChangeAspect="1"/>
-          </p:cNvPicPr>
-          <p:nvPr/>
-        </p:nvPicPr>
-        <p:blipFill>
-          <a:blip r:embed="rId5"/>
-          <a:stretch>
-            <a:fillRect/>
-          </a:stretch>
-        </p:blipFill>
-        <p:spPr>
-          <a:xfrm>
-            <a:off x="1734000" y="4963360"/>
-            <a:ext cx="659441" cy="614479"/>
-          </a:xfrm>
-          <a:prstGeom prst="rect">
-            <a:avLst/>
-          </a:prstGeom>
-        </p:spPr>
-      </p:pic>
-      <p:sp>
-        <p:nvSpPr>
-          <p:cNvPr id="18" name="TextBox 17"/>
+      <p:sp>
+        <p:nvSpPr>
+          <p:cNvPr id="17" name="TextBox 16"/>
           <p:cNvSpPr txBox="1"/>
           <p:nvPr/>
         </p:nvSpPr>
@@ -24907,7 +24883,7 @@
       </p:sp>
       <p:sp>
         <p:nvSpPr>
-          <p:cNvPr id="19" name="TextBox 18"/>
+          <p:cNvPr id="18" name="TextBox 17"/>
           <p:cNvSpPr txBox="1"/>
           <p:nvPr/>
         </p:nvSpPr>
@@ -24949,7 +24925,7 @@
       </p:sp>
       <p:sp>
         <p:nvSpPr>
-          <p:cNvPr id="20" name="TextBox 19"/>
+          <p:cNvPr id="19" name="TextBox 18"/>
           <p:cNvSpPr txBox="1"/>
           <p:nvPr/>
         </p:nvSpPr>
@@ -24991,7 +24967,7 @@
       </p:sp>
       <p:sp>
         <p:nvSpPr>
-          <p:cNvPr id="21" name="Oval 20"/>
+          <p:cNvPr id="20" name="Oval 19"/>
           <p:cNvSpPr/>
           <p:nvPr/>
         </p:nvSpPr>
@@ -25033,7 +25009,7 @@
       </p:sp>
       <p:sp>
         <p:nvSpPr>
-          <p:cNvPr id="22" name="Oval 21"/>
+          <p:cNvPr id="21" name="Oval 20"/>
           <p:cNvSpPr/>
           <p:nvPr/>
         </p:nvSpPr>
@@ -25075,7 +25051,7 @@
       </p:sp>
       <p:sp>
         <p:nvSpPr>
-          <p:cNvPr id="23" name="Oval 22"/>
+          <p:cNvPr id="22" name="Oval 21"/>
           <p:cNvSpPr/>
           <p:nvPr/>
         </p:nvSpPr>
@@ -25117,7 +25093,7 @@
       </p:sp>
       <p:sp>
         <p:nvSpPr>
-          <p:cNvPr id="24" name="TextBox 23"/>
+          <p:cNvPr id="23" name="TextBox 22"/>
           <p:cNvSpPr txBox="1"/>
           <p:nvPr/>
         </p:nvSpPr>
@@ -25159,7 +25135,7 @@
       </p:sp>
       <p:cxnSp>
         <p:nvCxnSpPr>
-          <p:cNvPr id="25" name="Connector 24"/>
+          <p:cNvPr id="24" name="Connector 23"/>
           <p:cNvCxnSpPr/>
           <p:nvPr/>
         </p:nvCxnSpPr>
@@ -25195,7 +25171,7 @@
       </p:cxnSp>
       <p:sp>
         <p:nvSpPr>
-          <p:cNvPr id="26" name="TextBox 25"/>
+          <p:cNvPr id="25" name="TextBox 24"/>
           <p:cNvSpPr txBox="1"/>
           <p:nvPr/>
         </p:nvSpPr>
@@ -25377,7 +25353,7 @@
       </p:sp>
       <p:sp>
         <p:nvSpPr>
-          <p:cNvPr id="27" name="Rectangle 26"/>
+          <p:cNvPr id="26" name="Rectangle 25"/>
           <p:cNvSpPr/>
           <p:nvPr/>
         </p:nvSpPr>
@@ -25419,7 +25395,31 @@
       </p:sp>
       <p:pic>
         <p:nvPicPr>
-          <p:cNvPr id="28" name="Picture 27" descr="classica-lotion.png"/>
+          <p:cNvPr id="27" name="Picture 26" descr="classica-lotion.png"/>
+          <p:cNvPicPr>
+            <a:picLocks noChangeAspect="1"/>
+          </p:cNvPicPr>
+          <p:nvPr/>
+        </p:nvPicPr>
+        <p:blipFill>
+          <a:blip r:embed="rId5"/>
+          <a:stretch>
+            <a:fillRect/>
+          </a:stretch>
+        </p:blipFill>
+        <p:spPr>
+          <a:xfrm>
+            <a:off x="2839439" y="3664632"/>
+            <a:ext cx="553048" cy="1728275"/>
+          </a:xfrm>
+          <a:prstGeom prst="rect">
+            <a:avLst/>
+          </a:prstGeom>
+        </p:spPr>
+      </p:pic>
+      <p:pic>
+        <p:nvPicPr>
+          <p:cNvPr id="28" name="Picture 27" descr="classica-serum.png"/>
           <p:cNvPicPr>
             <a:picLocks noChangeAspect="1"/>
           </p:cNvPicPr>
@@ -25433,8 +25433,8 @@
         </p:blipFill>
         <p:spPr>
           <a:xfrm>
-            <a:off x="2992642" y="4154046"/>
-            <a:ext cx="455613" cy="1423793"/>
+            <a:off x="3456495" y="3922963"/>
+            <a:ext cx="371124" cy="1469943"/>
           </a:xfrm>
           <a:prstGeom prst="rect">
             <a:avLst/>
@@ -25443,7 +25443,7 @@
       </p:pic>
       <p:pic>
         <p:nvPicPr>
-          <p:cNvPr id="29" name="Picture 28" descr="classica-serum.png"/>
+          <p:cNvPr id="29" name="Picture 28" descr="classica-cream.png"/>
           <p:cNvPicPr>
             <a:picLocks noChangeAspect="1"/>
           </p:cNvPicPr>
@@ -25457,41 +25457,17 @@
         </p:blipFill>
         <p:spPr>
           <a:xfrm>
-            <a:off x="3512264" y="4366866"/>
-            <a:ext cx="305740" cy="1210973"/>
+            <a:off x="3891628" y="4617912"/>
+            <a:ext cx="815018" cy="774994"/>
           </a:xfrm>
           <a:prstGeom prst="rect">
             <a:avLst/>
           </a:prstGeom>
         </p:spPr>
       </p:pic>
-      <p:pic>
-        <p:nvPicPr>
-          <p:cNvPr id="30" name="Picture 29" descr="classica-cream.png"/>
-          <p:cNvPicPr>
-            <a:picLocks noChangeAspect="1"/>
-          </p:cNvPicPr>
-          <p:nvPr/>
-        </p:nvPicPr>
-        <p:blipFill>
-          <a:blip r:embed="rId8"/>
-          <a:stretch>
-            <a:fillRect/>
-          </a:stretch>
-        </p:blipFill>
-        <p:spPr>
-          <a:xfrm>
-            <a:off x="3882012" y="4939381"/>
-            <a:ext cx="671430" cy="638458"/>
-          </a:xfrm>
-          <a:prstGeom prst="rect">
-            <a:avLst/>
-          </a:prstGeom>
-        </p:spPr>
-      </p:pic>
-      <p:sp>
-        <p:nvSpPr>
-          <p:cNvPr id="31" name="TextBox 30"/>
+      <p:sp>
+        <p:nvSpPr>
+          <p:cNvPr id="30" name="TextBox 29"/>
           <p:cNvSpPr txBox="1"/>
           <p:nvPr/>
         </p:nvSpPr>
@@ -25555,7 +25531,7 @@
       </p:sp>
       <p:sp>
         <p:nvSpPr>
-          <p:cNvPr id="32" name="TextBox 31"/>
+          <p:cNvPr id="31" name="TextBox 30"/>
           <p:cNvSpPr txBox="1"/>
           <p:nvPr/>
         </p:nvSpPr>
@@ -25597,7 +25573,7 @@
       </p:sp>
       <p:sp>
         <p:nvSpPr>
-          <p:cNvPr id="33" name="TextBox 32"/>
+          <p:cNvPr id="32" name="TextBox 31"/>
           <p:cNvSpPr txBox="1"/>
           <p:nvPr/>
         </p:nvSpPr>
@@ -25639,7 +25615,7 @@
       </p:sp>
       <p:sp>
         <p:nvSpPr>
-          <p:cNvPr id="34" name="Oval 33"/>
+          <p:cNvPr id="33" name="Oval 32"/>
           <p:cNvSpPr/>
           <p:nvPr/>
         </p:nvSpPr>
@@ -25681,7 +25657,7 @@
       </p:sp>
       <p:sp>
         <p:nvSpPr>
-          <p:cNvPr id="35" name="Oval 34"/>
+          <p:cNvPr id="34" name="Oval 33"/>
           <p:cNvSpPr/>
           <p:nvPr/>
         </p:nvSpPr>
@@ -25725,7 +25701,7 @@
       </p:sp>
       <p:sp>
         <p:nvSpPr>
-          <p:cNvPr id="36" name="Oval 35"/>
+          <p:cNvPr id="35" name="Oval 34"/>
           <p:cNvSpPr/>
           <p:nvPr/>
         </p:nvSpPr>
@@ -25769,7 +25745,7 @@
       </p:sp>
       <p:sp>
         <p:nvSpPr>
-          <p:cNvPr id="37" name="TextBox 36"/>
+          <p:cNvPr id="36" name="TextBox 35"/>
           <p:cNvSpPr txBox="1"/>
           <p:nvPr/>
         </p:nvSpPr>
@@ -25811,7 +25787,7 @@
       </p:sp>
       <p:cxnSp>
         <p:nvCxnSpPr>
-          <p:cNvPr id="38" name="Connector 37"/>
+          <p:cNvPr id="37" name="Connector 36"/>
           <p:cNvCxnSpPr/>
           <p:nvPr/>
         </p:nvCxnSpPr>
@@ -25847,7 +25823,7 @@
       </p:cxnSp>
       <p:sp>
         <p:nvSpPr>
-          <p:cNvPr id="39" name="TextBox 38"/>
+          <p:cNvPr id="38" name="TextBox 37"/>
           <p:cNvSpPr txBox="1"/>
           <p:nvPr/>
         </p:nvSpPr>
@@ -26029,7 +26005,7 @@
       </p:sp>
       <p:sp>
         <p:nvSpPr>
-          <p:cNvPr id="40" name="Rectangle 39"/>
+          <p:cNvPr id="39" name="Rectangle 38"/>
           <p:cNvSpPr/>
           <p:nvPr/>
         </p:nvSpPr>
@@ -26071,7 +26047,31 @@
       </p:sp>
       <p:pic>
         <p:nvPicPr>
-          <p:cNvPr id="41" name="Picture 40" descr="refre-shampoo.png"/>
+          <p:cNvPr id="40" name="Picture 39" descr="refre-shampoo.png"/>
+          <p:cNvPicPr>
+            <a:picLocks noChangeAspect="1"/>
+          </p:cNvPicPr>
+          <p:nvPr/>
+        </p:nvPicPr>
+        <p:blipFill>
+          <a:blip r:embed="rId8"/>
+          <a:stretch>
+            <a:fillRect/>
+          </a:stretch>
+        </p:blipFill>
+        <p:spPr>
+          <a:xfrm>
+            <a:off x="5152644" y="3568212"/>
+            <a:ext cx="571240" cy="1824694"/>
+          </a:xfrm>
+          <a:prstGeom prst="rect">
+            <a:avLst/>
+          </a:prstGeom>
+        </p:spPr>
+      </p:pic>
+      <p:pic>
+        <p:nvPicPr>
+          <p:cNvPr id="41" name="Picture 40" descr="refre-treatment.png"/>
           <p:cNvPicPr>
             <a:picLocks noChangeAspect="1"/>
           </p:cNvPicPr>
@@ -26085,8 +26085,8 @@
         </p:blipFill>
         <p:spPr>
           <a:xfrm>
-            <a:off x="5313538" y="4074614"/>
-            <a:ext cx="470601" cy="1503225"/>
+            <a:off x="5787892" y="3568212"/>
+            <a:ext cx="571240" cy="1824694"/>
           </a:xfrm>
           <a:prstGeom prst="rect">
             <a:avLst/>
@@ -26095,7 +26095,7 @@
       </p:pic>
       <p:pic>
         <p:nvPicPr>
-          <p:cNvPr id="42" name="Picture 41" descr="refre-treatment.png"/>
+          <p:cNvPr id="42" name="Picture 41" descr="refre-refill.png"/>
           <p:cNvPicPr>
             <a:picLocks noChangeAspect="1"/>
           </p:cNvPicPr>
@@ -26109,41 +26109,17 @@
         </p:blipFill>
         <p:spPr>
           <a:xfrm>
-            <a:off x="5848147" y="4074614"/>
-            <a:ext cx="470601" cy="1503225"/>
+            <a:off x="6423140" y="3801074"/>
+            <a:ext cx="684033" cy="1591832"/>
           </a:xfrm>
           <a:prstGeom prst="rect">
             <a:avLst/>
           </a:prstGeom>
         </p:spPr>
       </p:pic>
-      <p:pic>
-        <p:nvPicPr>
-          <p:cNvPr id="43" name="Picture 42" descr="refre-refill.png"/>
-          <p:cNvPicPr>
-            <a:picLocks noChangeAspect="1"/>
-          </p:cNvPicPr>
-          <p:nvPr/>
-        </p:nvPicPr>
-        <p:blipFill>
-          <a:blip r:embed="rId11"/>
-          <a:stretch>
-            <a:fillRect/>
-          </a:stretch>
-        </p:blipFill>
-        <p:spPr>
-          <a:xfrm>
-            <a:off x="6382756" y="4266451"/>
-            <a:ext cx="563522" cy="1311388"/>
-          </a:xfrm>
-          <a:prstGeom prst="rect">
-            <a:avLst/>
-          </a:prstGeom>
-        </p:spPr>
-      </p:pic>
-      <p:sp>
-        <p:nvSpPr>
-          <p:cNvPr id="44" name="TextBox 43"/>
+      <p:sp>
+        <p:nvSpPr>
+          <p:cNvPr id="43" name="TextBox 42"/>
           <p:cNvSpPr txBox="1"/>
           <p:nvPr/>
         </p:nvSpPr>
@@ -26207,7 +26183,7 @@
       </p:sp>
       <p:sp>
         <p:nvSpPr>
-          <p:cNvPr id="45" name="TextBox 44"/>
+          <p:cNvPr id="44" name="TextBox 43"/>
           <p:cNvSpPr txBox="1"/>
           <p:nvPr/>
         </p:nvSpPr>
@@ -26249,7 +26225,7 @@
       </p:sp>
       <p:sp>
         <p:nvSpPr>
-          <p:cNvPr id="46" name="TextBox 45"/>
+          <p:cNvPr id="45" name="TextBox 44"/>
           <p:cNvSpPr txBox="1"/>
           <p:nvPr/>
         </p:nvSpPr>
@@ -26291,7 +26267,7 @@
       </p:sp>
       <p:sp>
         <p:nvSpPr>
-          <p:cNvPr id="47" name="Oval 46"/>
+          <p:cNvPr id="46" name="Oval 45"/>
           <p:cNvSpPr/>
           <p:nvPr/>
         </p:nvSpPr>
@@ -26333,7 +26309,7 @@
       </p:sp>
       <p:sp>
         <p:nvSpPr>
-          <p:cNvPr id="48" name="Oval 47"/>
+          <p:cNvPr id="47" name="Oval 46"/>
           <p:cNvSpPr/>
           <p:nvPr/>
         </p:nvSpPr>
@@ -26375,7 +26351,7 @@
       </p:sp>
       <p:sp>
         <p:nvSpPr>
-          <p:cNvPr id="49" name="Oval 48"/>
+          <p:cNvPr id="48" name="Oval 47"/>
           <p:cNvSpPr/>
           <p:nvPr/>
         </p:nvSpPr>
@@ -26417,7 +26393,7 @@
       </p:sp>
       <p:sp>
         <p:nvSpPr>
-          <p:cNvPr id="50" name="TextBox 49"/>
+          <p:cNvPr id="49" name="TextBox 48"/>
           <p:cNvSpPr txBox="1"/>
           <p:nvPr/>
         </p:nvSpPr>
@@ -26459,7 +26435,7 @@
       </p:sp>
       <p:cxnSp>
         <p:nvCxnSpPr>
-          <p:cNvPr id="51" name="Connector 50"/>
+          <p:cNvPr id="50" name="Connector 49"/>
           <p:cNvCxnSpPr/>
           <p:nvPr/>
         </p:nvCxnSpPr>
@@ -26495,7 +26471,7 @@
       </p:cxnSp>
       <p:sp>
         <p:nvSpPr>
-          <p:cNvPr id="52" name="TextBox 51"/>
+          <p:cNvPr id="51" name="TextBox 50"/>
           <p:cNvSpPr txBox="1"/>
           <p:nvPr/>
         </p:nvSpPr>
@@ -26677,7 +26653,7 @@
       </p:sp>
       <p:sp>
         <p:nvSpPr>
-          <p:cNvPr id="53" name="Rectangle 52"/>
+          <p:cNvPr id="52" name="Rectangle 51"/>
           <p:cNvSpPr/>
           <p:nvPr/>
         </p:nvSpPr>
@@ -26719,7 +26695,31 @@
       </p:sp>
       <p:pic>
         <p:nvPicPr>
-          <p:cNvPr id="54" name="Picture 53" descr="harenohi-tube.png"/>
+          <p:cNvPr id="53" name="Picture 52" descr="harenohi-tube.png"/>
+          <p:cNvPicPr>
+            <a:picLocks noChangeAspect="1"/>
+          </p:cNvPicPr>
+          <p:nvPr/>
+        </p:nvPicPr>
+        <p:blipFill>
+          <a:blip r:embed="rId11"/>
+          <a:stretch>
+            <a:fillRect/>
+          </a:stretch>
+        </p:blipFill>
+        <p:spPr>
+          <a:xfrm>
+            <a:off x="7844249" y="3777424"/>
+            <a:ext cx="429339" cy="1615482"/>
+          </a:xfrm>
+          <a:prstGeom prst="rect">
+            <a:avLst/>
+          </a:prstGeom>
+        </p:spPr>
+      </p:pic>
+      <p:pic>
+        <p:nvPicPr>
+          <p:cNvPr id="54" name="Picture 53" descr="harenohi-spray.png"/>
           <p:cNvPicPr>
             <a:picLocks noChangeAspect="1"/>
           </p:cNvPicPr>
@@ -26733,8 +26733,8 @@
         </p:blipFill>
         <p:spPr>
           <a:xfrm>
-            <a:off x="7946170" y="4246968"/>
-            <a:ext cx="353700" cy="1330871"/>
+            <a:off x="8337597" y="3952071"/>
+            <a:ext cx="400232" cy="1440835"/>
           </a:xfrm>
           <a:prstGeom prst="rect">
             <a:avLst/>
@@ -26743,7 +26743,7 @@
       </p:pic>
       <p:pic>
         <p:nvPicPr>
-          <p:cNvPr id="55" name="Picture 54" descr="harenohi-spray.png"/>
+          <p:cNvPr id="55" name="Picture 54" descr="harenohi-stick.png"/>
           <p:cNvPicPr>
             <a:picLocks noChangeAspect="1"/>
           </p:cNvPicPr>
@@ -26757,41 +26757,17 @@
         </p:blipFill>
         <p:spPr>
           <a:xfrm>
-            <a:off x="8363879" y="4390846"/>
-            <a:ext cx="329720" cy="1186993"/>
+            <a:off x="8801837" y="4286811"/>
+            <a:ext cx="327462" cy="1106096"/>
           </a:xfrm>
           <a:prstGeom prst="rect">
             <a:avLst/>
           </a:prstGeom>
         </p:spPr>
       </p:pic>
-      <p:pic>
-        <p:nvPicPr>
-          <p:cNvPr id="56" name="Picture 55" descr="harenohi-stick.png"/>
-          <p:cNvPicPr>
-            <a:picLocks noChangeAspect="1"/>
-          </p:cNvPicPr>
-          <p:nvPr/>
-        </p:nvPicPr>
-        <p:blipFill>
-          <a:blip r:embed="rId14"/>
-          <a:stretch>
-            <a:fillRect/>
-          </a:stretch>
-        </p:blipFill>
-        <p:spPr>
-          <a:xfrm>
-            <a:off x="8757607" y="4666612"/>
-            <a:ext cx="269771" cy="911227"/>
-          </a:xfrm>
-          <a:prstGeom prst="rect">
-            <a:avLst/>
-          </a:prstGeom>
-        </p:spPr>
-      </p:pic>
-      <p:sp>
-        <p:nvSpPr>
-          <p:cNvPr id="57" name="TextBox 56"/>
+      <p:sp>
+        <p:nvSpPr>
+          <p:cNvPr id="56" name="TextBox 55"/>
           <p:cNvSpPr txBox="1"/>
           <p:nvPr/>
         </p:nvSpPr>
@@ -26855,7 +26831,7 @@
       </p:sp>
       <p:sp>
         <p:nvSpPr>
-          <p:cNvPr id="58" name="TextBox 57"/>
+          <p:cNvPr id="57" name="TextBox 56"/>
           <p:cNvSpPr txBox="1"/>
           <p:nvPr/>
         </p:nvSpPr>
@@ -26897,7 +26873,7 @@
       </p:sp>
       <p:sp>
         <p:nvSpPr>
-          <p:cNvPr id="59" name="TextBox 58"/>
+          <p:cNvPr id="58" name="TextBox 57"/>
           <p:cNvSpPr txBox="1"/>
           <p:nvPr/>
         </p:nvSpPr>
@@ -26939,7 +26915,7 @@
       </p:sp>
       <p:sp>
         <p:nvSpPr>
-          <p:cNvPr id="60" name="Oval 59"/>
+          <p:cNvPr id="59" name="Oval 58"/>
           <p:cNvSpPr/>
           <p:nvPr/>
         </p:nvSpPr>
@@ -26981,7 +26957,7 @@
       </p:sp>
       <p:sp>
         <p:nvSpPr>
-          <p:cNvPr id="61" name="Oval 60"/>
+          <p:cNvPr id="60" name="Oval 59"/>
           <p:cNvSpPr/>
           <p:nvPr/>
         </p:nvSpPr>
@@ -27023,7 +26999,7 @@
       </p:sp>
       <p:sp>
         <p:nvSpPr>
-          <p:cNvPr id="62" name="Oval 61"/>
+          <p:cNvPr id="61" name="Oval 60"/>
           <p:cNvSpPr/>
           <p:nvPr/>
         </p:nvSpPr>
@@ -29046,6 +29022,33 @@
               <a:t>この文章はサンプルです。この文章はサンプルです。</a:t>
             </a:r>
           </a:p>
+          <a:p>
+            <a:pPr algn="l" marL="329184" indent="-155448">
+              <a:lnSpc>
+                <a:spcPct val="115000"/>
+              </a:lnSpc>
+              <a:spcBef>
+                <a:spcPts val="150"/>
+              </a:spcBef>
+              <a:buClr>
+                <a:srgbClr val="4A4A4A"/>
+              </a:buClr>
+              <a:buSzPct val="100000"/>
+              <a:buFont typeface="Arial"/>
+              <a:buChar char="–"/>
+            </a:pPr>
+            <a:r>
+              <a:rPr sz="900" b="0">
+                <a:solidFill>
+                  <a:srgbClr val="1A1A1A"/>
+                </a:solidFill>
+                <a:latin typeface="BIZ UDPゴシック"/>
+                <a:ea typeface="BIZ UDPゴシック"/>
+                <a:cs typeface="BIZ UDPゴシック"/>
+              </a:rPr>
+              <a:t>この文章はサンプルです。</a:t>
+            </a:r>
+          </a:p>
         </p:txBody>
       </p:sp>
     </p:spTree>
@@ -30056,8 +30059,8 @@
         </p:nvSpPr>
         <p:spPr>
           <a:xfrm>
-            <a:off x="1375029" y="1938528"/>
-            <a:ext cx="219456" cy="219456"/>
+            <a:off x="1384173" y="1947672"/>
+            <a:ext cx="201168" cy="201168"/>
           </a:xfrm>
           <a:prstGeom prst="ellipse">
             <a:avLst/>
@@ -30098,8 +30101,8 @@
         </p:nvSpPr>
         <p:spPr>
           <a:xfrm>
-            <a:off x="1329309" y="1938528"/>
-            <a:ext cx="310896" cy="219456"/>
+            <a:off x="1338453" y="1947672"/>
+            <a:ext cx="292608" cy="201168"/>
           </a:xfrm>
           <a:prstGeom prst="rect">
             <a:avLst/>
@@ -30119,7 +30122,7 @@
               <a:buNone/>
             </a:pPr>
             <a:r>
-              <a:rPr sz="850" b="1">
+              <a:rPr sz="800" b="1">
                 <a:solidFill>
                   <a:srgbClr val="FFFFFF"/>
                 </a:solidFill>
@@ -30182,8 +30185,8 @@
         </p:nvSpPr>
         <p:spPr>
           <a:xfrm>
-            <a:off x="2915793" y="1938528"/>
-            <a:ext cx="219456" cy="219456"/>
+            <a:off x="2924937" y="1947672"/>
+            <a:ext cx="201168" cy="201168"/>
           </a:xfrm>
           <a:prstGeom prst="ellipse">
             <a:avLst/>
@@ -30224,8 +30227,8 @@
         </p:nvSpPr>
         <p:spPr>
           <a:xfrm>
-            <a:off x="2870073" y="1938528"/>
-            <a:ext cx="310896" cy="219456"/>
+            <a:off x="2879217" y="1947672"/>
+            <a:ext cx="292608" cy="201168"/>
           </a:xfrm>
           <a:prstGeom prst="rect">
             <a:avLst/>
@@ -30245,7 +30248,7 @@
               <a:buNone/>
             </a:pPr>
             <a:r>
-              <a:rPr sz="850" b="1">
+              <a:rPr sz="800" b="1">
                 <a:solidFill>
                   <a:srgbClr val="FFFFFF"/>
                 </a:solidFill>
@@ -30308,8 +30311,8 @@
         </p:nvSpPr>
         <p:spPr>
           <a:xfrm>
-            <a:off x="3942969" y="1938528"/>
-            <a:ext cx="219456" cy="219456"/>
+            <a:off x="3952113" y="1947672"/>
+            <a:ext cx="201168" cy="201168"/>
           </a:xfrm>
           <a:prstGeom prst="ellipse">
             <a:avLst/>
@@ -30350,8 +30353,8 @@
         </p:nvSpPr>
         <p:spPr>
           <a:xfrm>
-            <a:off x="3897249" y="1938528"/>
-            <a:ext cx="310896" cy="219456"/>
+            <a:off x="3906393" y="1947672"/>
+            <a:ext cx="292608" cy="201168"/>
           </a:xfrm>
           <a:prstGeom prst="rect">
             <a:avLst/>
@@ -30371,7 +30374,7 @@
               <a:buNone/>
             </a:pPr>
             <a:r>
-              <a:rPr sz="850" b="1">
+              <a:rPr sz="800" b="1">
                 <a:solidFill>
                   <a:srgbClr val="FFFFFF"/>
                 </a:solidFill>
@@ -30434,8 +30437,8 @@
         </p:nvSpPr>
         <p:spPr>
           <a:xfrm>
-            <a:off x="5740527" y="1938528"/>
-            <a:ext cx="219456" cy="219456"/>
+            <a:off x="5749671" y="1947672"/>
+            <a:ext cx="201168" cy="201168"/>
           </a:xfrm>
           <a:prstGeom prst="ellipse">
             <a:avLst/>
@@ -30476,8 +30479,8 @@
         </p:nvSpPr>
         <p:spPr>
           <a:xfrm>
-            <a:off x="5694807" y="1938528"/>
-            <a:ext cx="310896" cy="219456"/>
+            <a:off x="5703951" y="1947672"/>
+            <a:ext cx="292608" cy="201168"/>
           </a:xfrm>
           <a:prstGeom prst="rect">
             <a:avLst/>
@@ -30497,7 +30500,7 @@
               <a:buNone/>
             </a:pPr>
             <a:r>
-              <a:rPr sz="850" b="1">
+              <a:rPr sz="800" b="1">
                 <a:solidFill>
                   <a:srgbClr val="FFFFFF"/>
                 </a:solidFill>
@@ -30560,8 +30563,8 @@
         </p:nvSpPr>
         <p:spPr>
           <a:xfrm>
-            <a:off x="7024497" y="1938528"/>
-            <a:ext cx="219456" cy="219456"/>
+            <a:off x="7033641" y="1947672"/>
+            <a:ext cx="201168" cy="201168"/>
           </a:xfrm>
           <a:prstGeom prst="ellipse">
             <a:avLst/>
@@ -30602,8 +30605,8 @@
         </p:nvSpPr>
         <p:spPr>
           <a:xfrm>
-            <a:off x="6978777" y="1938528"/>
-            <a:ext cx="310896" cy="219456"/>
+            <a:off x="6987921" y="1947672"/>
+            <a:ext cx="292608" cy="201168"/>
           </a:xfrm>
           <a:prstGeom prst="rect">
             <a:avLst/>
@@ -30623,7 +30626,7 @@
               <a:buNone/>
             </a:pPr>
             <a:r>
-              <a:rPr sz="850" b="1">
+              <a:rPr sz="800" b="1">
                 <a:solidFill>
                   <a:srgbClr val="FFFFFF"/>
                 </a:solidFill>
@@ -30686,8 +30689,8 @@
         </p:nvSpPr>
         <p:spPr>
           <a:xfrm>
-            <a:off x="7281291" y="1938528"/>
-            <a:ext cx="219456" cy="219456"/>
+            <a:off x="7290435" y="1947672"/>
+            <a:ext cx="201168" cy="201168"/>
           </a:xfrm>
           <a:prstGeom prst="ellipse">
             <a:avLst/>
@@ -30728,8 +30731,8 @@
         </p:nvSpPr>
         <p:spPr>
           <a:xfrm>
-            <a:off x="7235571" y="1938528"/>
-            <a:ext cx="310896" cy="219456"/>
+            <a:off x="7244715" y="1947672"/>
+            <a:ext cx="292608" cy="201168"/>
           </a:xfrm>
           <a:prstGeom prst="rect">
             <a:avLst/>
@@ -30749,7 +30752,7 @@
               <a:buNone/>
             </a:pPr>
             <a:r>
-              <a:rPr sz="850" b="1">
+              <a:rPr sz="800" b="1">
                 <a:solidFill>
                   <a:srgbClr val="FFFFFF"/>
                 </a:solidFill>
@@ -30812,8 +30815,8 @@
         </p:nvSpPr>
         <p:spPr>
           <a:xfrm>
-            <a:off x="7794879" y="1938528"/>
-            <a:ext cx="219456" cy="219456"/>
+            <a:off x="7804023" y="1947672"/>
+            <a:ext cx="201168" cy="201168"/>
           </a:xfrm>
           <a:prstGeom prst="ellipse">
             <a:avLst/>
@@ -30854,8 +30857,8 @@
         </p:nvSpPr>
         <p:spPr>
           <a:xfrm>
-            <a:off x="7749159" y="1938528"/>
-            <a:ext cx="310896" cy="219456"/>
+            <a:off x="7758303" y="1947672"/>
+            <a:ext cx="292608" cy="201168"/>
           </a:xfrm>
           <a:prstGeom prst="rect">
             <a:avLst/>
@@ -30875,7 +30878,7 @@
               <a:buNone/>
             </a:pPr>
             <a:r>
-              <a:rPr sz="850" b="1">
+              <a:rPr sz="800" b="1">
                 <a:solidFill>
                   <a:srgbClr val="FFFFFF"/>
                 </a:solidFill>
